--- a/submission/EvalPilot-Initial-Submission.pptx
+++ b/submission/EvalPilot-Initial-Submission.pptx
@@ -930,7 +930,7 @@
           <a:lstStyle/>
           <a:p>
             <a:r>
-              <a:t>说明公开开源依赖、受控 candidate patch 和失败语义。再次强调受控 patch 不代表上游项目本身有缺陷。</a:t>
+              <a:t>四个适配器都通过真实边界测量：公开 Haystack pipeline、公开 mem0 浏览器界面、第三方 MCP SDK 双运行时、以及外部团队接入模板。受控 candidate patch 不代表上游项目本身有缺陷。发行侧补充 SHA-256 与清单校验，并在全新解压目录重新安装验收。</a:t>
             </a:r>
           </a:p>
         </p:txBody>
@@ -1070,7 +1070,7 @@
           <a:lstStyle/>
           <a:p>
             <a:r>
-              <a:t>收束到一句主张：不是增加更多 AI 功能，而是把 AI 发布从主观判断变成可验证、可阻断的工程流程。</a:t>
+              <a:t>左栏是可当场复核的实测能力，右栏是尚未验证的下一步，二者不混写。真实客户生产部署、多租户权限和第二模型对照仍未验证，不作为已完成能力。</a:t>
             </a:r>
           </a:p>
         </p:txBody>
@@ -11476,7 +11476,46 @@
       </p:sp>
       <p:sp>
         <p:nvSpPr>
-          <p:cNvPr id="12" name="Rounded Rectangle 11"/>
+          <p:cNvPr id="12" name="TextBox 11"/>
+          <p:cNvSpPr txBox="1"/>
+          <p:nvPr/>
+        </p:nvSpPr>
+        <p:spPr>
+          <a:xfrm>
+            <a:off x="777240" y="3200400"/>
+            <a:ext cx="5120640" cy="292608"/>
+          </a:xfrm>
+          <a:prstGeom prst="rect">
+            <a:avLst/>
+          </a:prstGeom>
+          <a:noFill/>
+        </p:spPr>
+        <p:txBody>
+          <a:bodyPr wrap="square" lIns="0" rIns="0" tIns="0" bIns="0" anchor="t">
+            <a:spAutoFit/>
+          </a:bodyPr>
+          <a:lstStyle/>
+          <a:p>
+            <a:pPr algn="l">
+              <a:lnSpc>
+                <a:spcPct val="100000"/>
+              </a:lnSpc>
+            </a:pPr>
+            <a:r>
+              <a:rPr sz="1000" b="1">
+                <a:solidFill>
+                  <a:srgbClr val="067647"/>
+                </a:solidFill>
+                <a:latin typeface="Microsoft YaHei"/>
+              </a:rPr>
+              <a:t>可校验发行包：SHA-256 + 文件清单 + 干净解压安装验收</a:t>
+            </a:r>
+          </a:p>
+        </p:txBody>
+      </p:sp>
+      <p:sp>
+        <p:nvSpPr>
+          <p:cNvPr id="13" name="Rounded Rectangle 12"/>
           <p:cNvSpPr/>
           <p:nvPr/>
         </p:nvSpPr>
@@ -11521,7 +11560,7 @@
       </p:sp>
       <p:sp>
         <p:nvSpPr>
-          <p:cNvPr id="13" name="TextBox 12"/>
+          <p:cNvPr id="14" name="TextBox 13"/>
           <p:cNvSpPr txBox="1"/>
           <p:nvPr/>
         </p:nvSpPr>
@@ -11560,7 +11599,7 @@
       </p:sp>
       <p:sp>
         <p:nvSpPr>
-          <p:cNvPr id="14" name="TextBox 13"/>
+          <p:cNvPr id="15" name="TextBox 14"/>
           <p:cNvSpPr txBox="1"/>
           <p:nvPr/>
         </p:nvSpPr>
@@ -11599,7 +11638,7 @@
       </p:sp>
       <p:sp>
         <p:nvSpPr>
-          <p:cNvPr id="15" name="TextBox 14"/>
+          <p:cNvPr id="16" name="TextBox 15"/>
           <p:cNvSpPr txBox="1"/>
           <p:nvPr/>
         </p:nvSpPr>
@@ -11638,7 +11677,7 @@
       </p:sp>
       <p:sp>
         <p:nvSpPr>
-          <p:cNvPr id="16" name="Rounded Rectangle 15"/>
+          <p:cNvPr id="17" name="Rounded Rectangle 16"/>
           <p:cNvSpPr/>
           <p:nvPr/>
         </p:nvSpPr>
@@ -11683,7 +11722,7 @@
       </p:sp>
       <p:sp>
         <p:nvSpPr>
-          <p:cNvPr id="17" name="TextBox 16"/>
+          <p:cNvPr id="18" name="TextBox 17"/>
           <p:cNvSpPr txBox="1"/>
           <p:nvPr/>
         </p:nvSpPr>
@@ -11722,7 +11761,7 @@
       </p:sp>
       <p:sp>
         <p:nvSpPr>
-          <p:cNvPr id="18" name="TextBox 17"/>
+          <p:cNvPr id="19" name="TextBox 18"/>
           <p:cNvSpPr txBox="1"/>
           <p:nvPr/>
         </p:nvSpPr>
@@ -11761,7 +11800,7 @@
       </p:sp>
       <p:sp>
         <p:nvSpPr>
-          <p:cNvPr id="19" name="TextBox 18"/>
+          <p:cNvPr id="20" name="TextBox 19"/>
           <p:cNvSpPr txBox="1"/>
           <p:nvPr/>
         </p:nvSpPr>
@@ -11800,7 +11839,7 @@
       </p:sp>
       <p:pic>
         <p:nvPicPr>
-          <p:cNvPr id="20" name="Picture 19" descr="report.png"/>
+          <p:cNvPr id="21" name="Picture 20" descr="report.png"/>
           <p:cNvPicPr>
             <a:picLocks noChangeAspect="1"/>
           </p:cNvPicPr>
@@ -11824,7 +11863,7 @@
       </p:pic>
       <p:sp>
         <p:nvSpPr>
-          <p:cNvPr id="21" name="Rounded Rectangle 20"/>
+          <p:cNvPr id="22" name="Rounded Rectangle 21"/>
           <p:cNvSpPr/>
           <p:nvPr/>
         </p:nvSpPr>
@@ -11869,13 +11908,13 @@
       </p:sp>
       <p:sp>
         <p:nvSpPr>
-          <p:cNvPr id="22" name="TextBox 21"/>
-          <p:cNvSpPr txBox="1"/>
-          <p:nvPr/>
-        </p:nvSpPr>
-        <p:spPr>
-          <a:xfrm>
-            <a:off x="7498079" y="4160520"/>
+          <p:cNvPr id="23" name="TextBox 22"/>
+          <p:cNvSpPr txBox="1"/>
+          <p:nvPr/>
+        </p:nvSpPr>
+        <p:spPr>
+          <a:xfrm>
+            <a:off x="7498079" y="4069080"/>
             <a:ext cx="3886200" cy="310896"/>
           </a:xfrm>
           <a:prstGeom prst="rect">
@@ -11895,26 +11934,26 @@
               </a:lnSpc>
             </a:pPr>
             <a:r>
-              <a:rPr sz="1700" b="1">
+              <a:rPr sz="1600" b="1">
                 <a:solidFill>
                   <a:srgbClr val="182230"/>
                 </a:solidFill>
                 <a:latin typeface="Microsoft YaHei"/>
               </a:rPr>
-              <a:t>证据不是“能跑一次”</a:t>
-            </a:r>
-          </a:p>
-        </p:txBody>
-      </p:sp>
-      <p:sp>
-        <p:nvSpPr>
-          <p:cNvPr id="23" name="TextBox 22"/>
-          <p:cNvSpPr txBox="1"/>
-          <p:nvPr/>
-        </p:nvSpPr>
-        <p:spPr>
-          <a:xfrm>
-            <a:off x="7498079" y="4626864"/>
+              <a:t>四个真实适配器，全部实测</a:t>
+            </a:r>
+          </a:p>
+        </p:txBody>
+      </p:sp>
+      <p:sp>
+        <p:nvSpPr>
+          <p:cNvPr id="24" name="TextBox 23"/>
+          <p:cNvSpPr txBox="1"/>
+          <p:nvPr/>
+        </p:nvSpPr>
+        <p:spPr>
+          <a:xfrm>
+            <a:off x="7498079" y="4480560"/>
             <a:ext cx="164592" cy="201168"/>
           </a:xfrm>
           <a:prstGeom prst="rect">
@@ -11934,7 +11973,7 @@
               </a:lnSpc>
             </a:pPr>
             <a:r>
-              <a:rPr sz="700" b="1">
+              <a:rPr sz="550" b="1">
                 <a:solidFill>
                   <a:srgbClr val="165DFF"/>
                 </a:solidFill>
@@ -11947,13 +11986,13 @@
       </p:sp>
       <p:sp>
         <p:nvSpPr>
-          <p:cNvPr id="24" name="TextBox 23"/>
-          <p:cNvSpPr txBox="1"/>
-          <p:nvPr/>
-        </p:nvSpPr>
-        <p:spPr>
-          <a:xfrm>
-            <a:off x="7726679" y="4613148"/>
+          <p:cNvPr id="25" name="TextBox 24"/>
+          <p:cNvSpPr txBox="1"/>
+          <p:nvPr/>
+        </p:nvSpPr>
+        <p:spPr>
+          <a:xfrm>
+            <a:off x="7726679" y="4466844"/>
             <a:ext cx="3611880" cy="411480"/>
           </a:xfrm>
           <a:prstGeom prst="rect">
@@ -11973,26 +12012,26 @@
               </a:lnSpc>
             </a:pPr>
             <a:r>
-              <a:rPr sz="1200" b="0">
+              <a:rPr sz="1050" b="0">
                 <a:solidFill>
                   <a:srgbClr val="182230"/>
                 </a:solidFill>
                 <a:latin typeface="Microsoft YaHei"/>
               </a:rPr>
-              <a:t>同版本控制 0 回归</a:t>
-            </a:r>
-          </a:p>
-        </p:txBody>
-      </p:sp>
-      <p:sp>
-        <p:nvSpPr>
-          <p:cNvPr id="25" name="TextBox 24"/>
-          <p:cNvSpPr txBox="1"/>
-          <p:nvPr/>
-        </p:nvSpPr>
-        <p:spPr>
-          <a:xfrm>
-            <a:off x="7498079" y="5020055"/>
+              <a:t>Haystack HTTP SUT：52 / 0 上游 · 8 / 26 受控回归</a:t>
+            </a:r>
+          </a:p>
+        </p:txBody>
+      </p:sp>
+      <p:sp>
+        <p:nvSpPr>
+          <p:cNvPr id="26" name="TextBox 25"/>
+          <p:cNvSpPr txBox="1"/>
+          <p:nvPr/>
+        </p:nvSpPr>
+        <p:spPr>
+          <a:xfrm>
+            <a:off x="7498079" y="4791456"/>
             <a:ext cx="164592" cy="201168"/>
           </a:xfrm>
           <a:prstGeom prst="rect">
@@ -12012,7 +12051,7 @@
               </a:lnSpc>
             </a:pPr>
             <a:r>
-              <a:rPr sz="700" b="1">
+              <a:rPr sz="550" b="1">
                 <a:solidFill>
                   <a:srgbClr val="165DFF"/>
                 </a:solidFill>
@@ -12025,13 +12064,13 @@
       </p:sp>
       <p:sp>
         <p:nvSpPr>
-          <p:cNvPr id="26" name="TextBox 25"/>
-          <p:cNvSpPr txBox="1"/>
-          <p:nvPr/>
-        </p:nvSpPr>
-        <p:spPr>
-          <a:xfrm>
-            <a:off x="7726679" y="5006340"/>
+          <p:cNvPr id="27" name="TextBox 26"/>
+          <p:cNvSpPr txBox="1"/>
+          <p:nvPr/>
+        </p:nvSpPr>
+        <p:spPr>
+          <a:xfrm>
+            <a:off x="7726679" y="4777740"/>
             <a:ext cx="3611880" cy="411480"/>
           </a:xfrm>
           <a:prstGeom prst="rect">
@@ -12051,20 +12090,98 @@
               </a:lnSpc>
             </a:pPr>
             <a:r>
-              <a:rPr sz="1200" b="0">
+              <a:rPr sz="1050" b="0">
                 <a:solidFill>
                   <a:srgbClr val="182230"/>
                 </a:solidFill>
                 <a:latin typeface="Microsoft YaHei"/>
               </a:rPr>
-              <a:t>离线缓存精确复现</a:t>
-            </a:r>
-          </a:p>
-        </p:txBody>
-      </p:sp>
-      <p:sp>
-        <p:nvSpPr>
-          <p:cNvPr id="27" name="TextBox 26"/>
+              <a:t>mem0 浏览器：3 次实测重放 · 18 截图 · 18 trace</a:t>
+            </a:r>
+          </a:p>
+        </p:txBody>
+      </p:sp>
+      <p:sp>
+        <p:nvSpPr>
+          <p:cNvPr id="28" name="TextBox 27"/>
+          <p:cNvSpPr txBox="1"/>
+          <p:nvPr/>
+        </p:nvSpPr>
+        <p:spPr>
+          <a:xfrm>
+            <a:off x="7498079" y="5102352"/>
+            <a:ext cx="164592" cy="201168"/>
+          </a:xfrm>
+          <a:prstGeom prst="rect">
+            <a:avLst/>
+          </a:prstGeom>
+          <a:noFill/>
+        </p:spPr>
+        <p:txBody>
+          <a:bodyPr wrap="square" lIns="0" rIns="0" tIns="0" bIns="0" anchor="t">
+            <a:spAutoFit/>
+          </a:bodyPr>
+          <a:lstStyle/>
+          <a:p>
+            <a:pPr algn="l">
+              <a:lnSpc>
+                <a:spcPct val="100000"/>
+              </a:lnSpc>
+            </a:pPr>
+            <a:r>
+              <a:rPr sz="550" b="1">
+                <a:solidFill>
+                  <a:srgbClr val="165DFF"/>
+                </a:solidFill>
+                <a:latin typeface="Microsoft YaHei"/>
+              </a:rPr>
+              <a:t>●</a:t>
+            </a:r>
+          </a:p>
+        </p:txBody>
+      </p:sp>
+      <p:sp>
+        <p:nvSpPr>
+          <p:cNvPr id="29" name="TextBox 28"/>
+          <p:cNvSpPr txBox="1"/>
+          <p:nvPr/>
+        </p:nvSpPr>
+        <p:spPr>
+          <a:xfrm>
+            <a:off x="7726679" y="5088636"/>
+            <a:ext cx="3611880" cy="411480"/>
+          </a:xfrm>
+          <a:prstGeom prst="rect">
+            <a:avLst/>
+          </a:prstGeom>
+          <a:noFill/>
+        </p:spPr>
+        <p:txBody>
+          <a:bodyPr wrap="square" lIns="0" rIns="0" tIns="0" bIns="0" anchor="t">
+            <a:spAutoFit/>
+          </a:bodyPr>
+          <a:lstStyle/>
+          <a:p>
+            <a:pPr algn="l">
+              <a:lnSpc>
+                <a:spcPct val="100000"/>
+              </a:lnSpc>
+            </a:pPr>
+            <a:r>
+              <a:rPr sz="1050" b="0">
+                <a:solidFill>
+                  <a:srgbClr val="182230"/>
+                </a:solidFill>
+                <a:latin typeface="Microsoft YaHei"/>
+              </a:rPr>
+              <a:t>MCP SDK：3 协议回归 · 3 次实测 HTTP 重放</a:t>
+            </a:r>
+          </a:p>
+        </p:txBody>
+      </p:sp>
+      <p:sp>
+        <p:nvSpPr>
+          <p:cNvPr id="30" name="TextBox 29"/>
           <p:cNvSpPr txBox="1"/>
           <p:nvPr/>
         </p:nvSpPr>
@@ -12090,7 +12207,7 @@
               </a:lnSpc>
             </a:pPr>
             <a:r>
-              <a:rPr sz="700" b="1">
+              <a:rPr sz="550" b="1">
                 <a:solidFill>
                   <a:srgbClr val="165DFF"/>
                 </a:solidFill>
@@ -12103,7 +12220,7 @@
       </p:sp>
       <p:sp>
         <p:nvSpPr>
-          <p:cNvPr id="28" name="TextBox 27"/>
+          <p:cNvPr id="31" name="TextBox 30"/>
           <p:cNvSpPr txBox="1"/>
           <p:nvPr/>
         </p:nvSpPr>
@@ -12129,13 +12246,13 @@
               </a:lnSpc>
             </a:pPr>
             <a:r>
-              <a:rPr sz="1200" b="0">
+              <a:rPr sz="1050" b="0">
                 <a:solidFill>
                   <a:srgbClr val="182230"/>
                 </a:solidFill>
                 <a:latin typeface="Microsoft YaHei"/>
               </a:rPr>
-              <a:t>SUT 故障明确失败，不回退 mock</a:t>
+              <a:t>外部 SUT 模板：8 匹配 · 5 回归 · 5 次实测重放</a:t>
             </a:r>
           </a:p>
         </p:txBody>
@@ -12970,7 +13087,7 @@
         </p:nvSpPr>
         <p:spPr>
           <a:xfrm>
-            <a:off x="4709160" y="3383280"/>
+            <a:off x="4709160" y="3291840"/>
             <a:ext cx="164592" cy="201168"/>
           </a:xfrm>
           <a:prstGeom prst="rect">
@@ -12990,7 +13107,7 @@
               </a:lnSpc>
             </a:pPr>
             <a:r>
-              <a:rPr sz="700" b="1">
+              <a:rPr sz="650" b="1">
                 <a:solidFill>
                   <a:srgbClr val="165DFF"/>
                 </a:solidFill>
@@ -13009,7 +13126,7 @@
         </p:nvSpPr>
         <p:spPr>
           <a:xfrm>
-            <a:off x="4937760" y="3369564"/>
+            <a:off x="4937760" y="3278124"/>
             <a:ext cx="2651760" cy="411480"/>
           </a:xfrm>
           <a:prstGeom prst="rect">
@@ -13029,7 +13146,7 @@
               </a:lnSpc>
             </a:pPr>
             <a:r>
-              <a:rPr sz="1200" b="0">
+              <a:rPr sz="1150" b="0">
                 <a:solidFill>
                   <a:srgbClr val="182230"/>
                 </a:solidFill>
@@ -13048,7 +13165,7 @@
         </p:nvSpPr>
         <p:spPr>
           <a:xfrm>
-            <a:off x="4709160" y="3886200"/>
+            <a:off x="4709160" y="3712464"/>
             <a:ext cx="164592" cy="201168"/>
           </a:xfrm>
           <a:prstGeom prst="rect">
@@ -13068,7 +13185,7 @@
               </a:lnSpc>
             </a:pPr>
             <a:r>
-              <a:rPr sz="700" b="1">
+              <a:rPr sz="650" b="1">
                 <a:solidFill>
                   <a:srgbClr val="165DFF"/>
                 </a:solidFill>
@@ -13087,7 +13204,7 @@
         </p:nvSpPr>
         <p:spPr>
           <a:xfrm>
-            <a:off x="4937760" y="3872484"/>
+            <a:off x="4937760" y="3698748"/>
             <a:ext cx="2651760" cy="411480"/>
           </a:xfrm>
           <a:prstGeom prst="rect">
@@ -13107,7 +13224,7 @@
               </a:lnSpc>
             </a:pPr>
             <a:r>
-              <a:rPr sz="1200" b="0">
+              <a:rPr sz="1150" b="0">
                 <a:solidFill>
                   <a:srgbClr val="182230"/>
                 </a:solidFill>
@@ -13126,7 +13243,7 @@
         </p:nvSpPr>
         <p:spPr>
           <a:xfrm>
-            <a:off x="4709160" y="4389120"/>
+            <a:off x="4709160" y="4133088"/>
             <a:ext cx="164592" cy="201168"/>
           </a:xfrm>
           <a:prstGeom prst="rect">
@@ -13146,7 +13263,7 @@
               </a:lnSpc>
             </a:pPr>
             <a:r>
-              <a:rPr sz="700" b="1">
+              <a:rPr sz="650" b="1">
                 <a:solidFill>
                   <a:srgbClr val="165DFF"/>
                 </a:solidFill>
@@ -13165,7 +13282,7 @@
         </p:nvSpPr>
         <p:spPr>
           <a:xfrm>
-            <a:off x="4937760" y="4375404"/>
+            <a:off x="4937760" y="4119372"/>
             <a:ext cx="2651760" cy="411480"/>
           </a:xfrm>
           <a:prstGeom prst="rect">
@@ -13185,7 +13302,7 @@
               </a:lnSpc>
             </a:pPr>
             <a:r>
-              <a:rPr sz="1200" b="0">
+              <a:rPr sz="1150" b="0">
                 <a:solidFill>
                   <a:srgbClr val="182230"/>
                 </a:solidFill>
@@ -13204,7 +13321,7 @@
         </p:nvSpPr>
         <p:spPr>
           <a:xfrm>
-            <a:off x="4709160" y="4892040"/>
+            <a:off x="4709160" y="4553712"/>
             <a:ext cx="164592" cy="201168"/>
           </a:xfrm>
           <a:prstGeom prst="rect">
@@ -13224,7 +13341,7 @@
               </a:lnSpc>
             </a:pPr>
             <a:r>
-              <a:rPr sz="700" b="1">
+              <a:rPr sz="650" b="1">
                 <a:solidFill>
                   <a:srgbClr val="165DFF"/>
                 </a:solidFill>
@@ -13243,7 +13360,7 @@
         </p:nvSpPr>
         <p:spPr>
           <a:xfrm>
-            <a:off x="4937760" y="4878324"/>
+            <a:off x="4937760" y="4539996"/>
             <a:ext cx="2651760" cy="411480"/>
           </a:xfrm>
           <a:prstGeom prst="rect">
@@ -13263,7 +13380,7 @@
               </a:lnSpc>
             </a:pPr>
             <a:r>
-              <a:rPr sz="1200" b="0">
+              <a:rPr sz="1150" b="0">
                 <a:solidFill>
                   <a:srgbClr val="182230"/>
                 </a:solidFill>
@@ -13276,7 +13393,85 @@
       </p:sp>
       <p:sp>
         <p:nvSpPr>
-          <p:cNvPr id="30" name="Rounded Rectangle 29"/>
+          <p:cNvPr id="30" name="TextBox 29"/>
+          <p:cNvSpPr txBox="1"/>
+          <p:nvPr/>
+        </p:nvSpPr>
+        <p:spPr>
+          <a:xfrm>
+            <a:off x="4709160" y="4974336"/>
+            <a:ext cx="164592" cy="201168"/>
+          </a:xfrm>
+          <a:prstGeom prst="rect">
+            <a:avLst/>
+          </a:prstGeom>
+          <a:noFill/>
+        </p:spPr>
+        <p:txBody>
+          <a:bodyPr wrap="square" lIns="0" rIns="0" tIns="0" bIns="0" anchor="t">
+            <a:spAutoFit/>
+          </a:bodyPr>
+          <a:lstStyle/>
+          <a:p>
+            <a:pPr algn="l">
+              <a:lnSpc>
+                <a:spcPct val="100000"/>
+              </a:lnSpc>
+            </a:pPr>
+            <a:r>
+              <a:rPr sz="650" b="1">
+                <a:solidFill>
+                  <a:srgbClr val="165DFF"/>
+                </a:solidFill>
+                <a:latin typeface="Microsoft YaHei"/>
+              </a:rPr>
+              <a:t>●</a:t>
+            </a:r>
+          </a:p>
+        </p:txBody>
+      </p:sp>
+      <p:sp>
+        <p:nvSpPr>
+          <p:cNvPr id="31" name="TextBox 30"/>
+          <p:cNvSpPr txBox="1"/>
+          <p:nvPr/>
+        </p:nvSpPr>
+        <p:spPr>
+          <a:xfrm>
+            <a:off x="4937760" y="4960620"/>
+            <a:ext cx="2651760" cy="411480"/>
+          </a:xfrm>
+          <a:prstGeom prst="rect">
+            <a:avLst/>
+          </a:prstGeom>
+          <a:noFill/>
+        </p:spPr>
+        <p:txBody>
+          <a:bodyPr wrap="square" lIns="0" rIns="0" tIns="0" bIns="0" anchor="t">
+            <a:spAutoFit/>
+          </a:bodyPr>
+          <a:lstStyle/>
+          <a:p>
+            <a:pPr algn="l">
+              <a:lnSpc>
+                <a:spcPct val="100000"/>
+              </a:lnSpc>
+            </a:pPr>
+            <a:r>
+              <a:rPr sz="1150" b="0">
+                <a:solidFill>
+                  <a:srgbClr val="182230"/>
+                </a:solidFill>
+                <a:latin typeface="Microsoft YaHei"/>
+              </a:rPr>
+              <a:t>可校验发行包（SHA-256）</a:t>
+            </a:r>
+          </a:p>
+        </p:txBody>
+      </p:sp>
+      <p:sp>
+        <p:nvSpPr>
+          <p:cNvPr id="32" name="Rounded Rectangle 31"/>
           <p:cNvSpPr/>
           <p:nvPr/>
         </p:nvSpPr>
@@ -13321,7 +13516,7 @@
       </p:sp>
       <p:sp>
         <p:nvSpPr>
-          <p:cNvPr id="31" name="TextBox 30"/>
+          <p:cNvPr id="33" name="TextBox 32"/>
           <p:cNvSpPr txBox="1"/>
           <p:nvPr/>
         </p:nvSpPr>
@@ -13360,7 +13555,7 @@
       </p:sp>
       <p:sp>
         <p:nvSpPr>
-          <p:cNvPr id="32" name="TextBox 31"/>
+          <p:cNvPr id="34" name="TextBox 33"/>
           <p:cNvSpPr txBox="1"/>
           <p:nvPr/>
         </p:nvSpPr>
@@ -13399,7 +13594,7 @@
       </p:sp>
       <p:sp>
         <p:nvSpPr>
-          <p:cNvPr id="33" name="TextBox 32"/>
+          <p:cNvPr id="35" name="TextBox 34"/>
           <p:cNvSpPr txBox="1"/>
           <p:nvPr/>
         </p:nvSpPr>
@@ -13439,7 +13634,7 @@
       </p:sp>
       <p:sp>
         <p:nvSpPr>
-          <p:cNvPr id="34" name="TextBox 33"/>
+          <p:cNvPr id="36" name="TextBox 35"/>
           <p:cNvSpPr txBox="1"/>
           <p:nvPr/>
         </p:nvSpPr>
@@ -13478,7 +13673,7 @@
       </p:sp>
       <p:sp>
         <p:nvSpPr>
-          <p:cNvPr id="35" name="TextBox 34"/>
+          <p:cNvPr id="37" name="TextBox 36"/>
           <p:cNvSpPr txBox="1"/>
           <p:nvPr/>
         </p:nvSpPr>
@@ -13518,7 +13713,7 @@
       </p:sp>
       <p:sp>
         <p:nvSpPr>
-          <p:cNvPr id="36" name="TextBox 35"/>
+          <p:cNvPr id="38" name="TextBox 37"/>
           <p:cNvSpPr txBox="1"/>
           <p:nvPr/>
         </p:nvSpPr>
@@ -13557,7 +13752,7 @@
       </p:sp>
       <p:sp>
         <p:nvSpPr>
-          <p:cNvPr id="37" name="TextBox 36"/>
+          <p:cNvPr id="39" name="TextBox 38"/>
           <p:cNvSpPr txBox="1"/>
           <p:nvPr/>
         </p:nvSpPr>
@@ -13597,7 +13792,7 @@
       </p:sp>
       <p:sp>
         <p:nvSpPr>
-          <p:cNvPr id="38" name="TextBox 37"/>
+          <p:cNvPr id="40" name="TextBox 39"/>
           <p:cNvSpPr txBox="1"/>
           <p:nvPr/>
         </p:nvSpPr>
@@ -13990,7 +14185,7 @@
         </p:nvSpPr>
         <p:spPr>
           <a:xfrm>
-            <a:off x="777240" y="2450592"/>
+            <a:off x="777240" y="2331720"/>
             <a:ext cx="164592" cy="201168"/>
           </a:xfrm>
           <a:prstGeom prst="rect">
@@ -14010,7 +14205,7 @@
               </a:lnSpc>
             </a:pPr>
             <a:r>
-              <a:rPr sz="800" b="1">
+              <a:rPr sz="600" b="1">
                 <a:solidFill>
                   <a:srgbClr val="165DFF"/>
                 </a:solidFill>
@@ -14029,33 +14224,33 @@
         </p:nvSpPr>
         <p:spPr>
           <a:xfrm>
-            <a:off x="1005840" y="2436876"/>
-            <a:ext cx="2651760" cy="411480"/>
-          </a:xfrm>
-          <a:prstGeom prst="rect">
-            <a:avLst/>
-          </a:prstGeom>
-          <a:noFill/>
-        </p:spPr>
-        <p:txBody>
-          <a:bodyPr wrap="square" lIns="0" rIns="0" tIns="0" bIns="0" anchor="t">
-            <a:spAutoFit/>
-          </a:bodyPr>
-          <a:lstStyle/>
-          <a:p>
-            <a:pPr algn="l">
-              <a:lnSpc>
-                <a:spcPct val="100000"/>
-              </a:lnSpc>
-            </a:pPr>
-            <a:r>
-              <a:rPr sz="1300" b="0">
+            <a:off x="1005840" y="2318003"/>
+            <a:ext cx="2743200" cy="411480"/>
+          </a:xfrm>
+          <a:prstGeom prst="rect">
+            <a:avLst/>
+          </a:prstGeom>
+          <a:noFill/>
+        </p:spPr>
+        <p:txBody>
+          <a:bodyPr wrap="square" lIns="0" rIns="0" tIns="0" bIns="0" anchor="t">
+            <a:spAutoFit/>
+          </a:bodyPr>
+          <a:lstStyle/>
+          <a:p>
+            <a:pPr algn="l">
+              <a:lnSpc>
+                <a:spcPct val="100000"/>
+              </a:lnSpc>
+            </a:pPr>
+            <a:r>
+              <a:rPr sz="1100" b="0">
                 <a:solidFill>
                   <a:srgbClr val="182230"/>
                 </a:solidFill>
                 <a:latin typeface="Microsoft YaHei"/>
               </a:rPr>
-              <a:t>公开产品站</a:t>
+              <a:t>公开产品站 + 演示视频</a:t>
             </a:r>
           </a:p>
         </p:txBody>
@@ -14068,7 +14263,7 @@
         </p:nvSpPr>
         <p:spPr>
           <a:xfrm>
-            <a:off x="777240" y="3072384"/>
+            <a:off x="777240" y="2788920"/>
             <a:ext cx="164592" cy="201168"/>
           </a:xfrm>
           <a:prstGeom prst="rect">
@@ -14088,7 +14283,7 @@
               </a:lnSpc>
             </a:pPr>
             <a:r>
-              <a:rPr sz="800" b="1">
+              <a:rPr sz="600" b="1">
                 <a:solidFill>
                   <a:srgbClr val="165DFF"/>
                 </a:solidFill>
@@ -14107,33 +14302,33 @@
         </p:nvSpPr>
         <p:spPr>
           <a:xfrm>
-            <a:off x="1005840" y="3058668"/>
-            <a:ext cx="2651760" cy="411480"/>
-          </a:xfrm>
-          <a:prstGeom prst="rect">
-            <a:avLst/>
-          </a:prstGeom>
-          <a:noFill/>
-        </p:spPr>
-        <p:txBody>
-          <a:bodyPr wrap="square" lIns="0" rIns="0" tIns="0" bIns="0" anchor="t">
-            <a:spAutoFit/>
-          </a:bodyPr>
-          <a:lstStyle/>
-          <a:p>
-            <a:pPr algn="l">
-              <a:lnSpc>
-                <a:spcPct val="100000"/>
-              </a:lnSpc>
-            </a:pPr>
-            <a:r>
-              <a:rPr sz="1300" b="0">
+            <a:off x="1005840" y="2775203"/>
+            <a:ext cx="2743200" cy="411480"/>
+          </a:xfrm>
+          <a:prstGeom prst="rect">
+            <a:avLst/>
+          </a:prstGeom>
+          <a:noFill/>
+        </p:spPr>
+        <p:txBody>
+          <a:bodyPr wrap="square" lIns="0" rIns="0" tIns="0" bIns="0" anchor="t">
+            <a:spAutoFit/>
+          </a:bodyPr>
+          <a:lstStyle/>
+          <a:p>
+            <a:pPr algn="l">
+              <a:lnSpc>
+                <a:spcPct val="100000"/>
+              </a:lnSpc>
+            </a:pPr>
+            <a:r>
+              <a:rPr sz="1100" b="0">
                 <a:solidFill>
                   <a:srgbClr val="182230"/>
                 </a:solidFill>
                 <a:latin typeface="Microsoft YaHei"/>
               </a:rPr>
-              <a:t>真实 HTTP SUT</a:t>
+              <a:t>真实 HTTP SUT 与离线回放</a:t>
             </a:r>
           </a:p>
         </p:txBody>
@@ -14146,7 +14341,7 @@
         </p:nvSpPr>
         <p:spPr>
           <a:xfrm>
-            <a:off x="777240" y="3694176"/>
+            <a:off x="777240" y="3246120"/>
             <a:ext cx="164592" cy="201168"/>
           </a:xfrm>
           <a:prstGeom prst="rect">
@@ -14166,7 +14361,7 @@
               </a:lnSpc>
             </a:pPr>
             <a:r>
-              <a:rPr sz="800" b="1">
+              <a:rPr sz="600" b="1">
                 <a:solidFill>
                   <a:srgbClr val="165DFF"/>
                 </a:solidFill>
@@ -14185,33 +14380,33 @@
         </p:nvSpPr>
         <p:spPr>
           <a:xfrm>
-            <a:off x="1005840" y="3680460"/>
-            <a:ext cx="2651760" cy="411480"/>
-          </a:xfrm>
-          <a:prstGeom prst="rect">
-            <a:avLst/>
-          </a:prstGeom>
-          <a:noFill/>
-        </p:spPr>
-        <p:txBody>
-          <a:bodyPr wrap="square" lIns="0" rIns="0" tIns="0" bIns="0" anchor="t">
-            <a:spAutoFit/>
-          </a:bodyPr>
-          <a:lstStyle/>
-          <a:p>
-            <a:pPr algn="l">
-              <a:lnSpc>
-                <a:spcPct val="100000"/>
-              </a:lnSpc>
-            </a:pPr>
-            <a:r>
-              <a:rPr sz="1300" b="0">
+            <a:off x="1005840" y="3232403"/>
+            <a:ext cx="2743200" cy="411480"/>
+          </a:xfrm>
+          <a:prstGeom prst="rect">
+            <a:avLst/>
+          </a:prstGeom>
+          <a:noFill/>
+        </p:spPr>
+        <p:txBody>
+          <a:bodyPr wrap="square" lIns="0" rIns="0" tIns="0" bIns="0" anchor="t">
+            <a:spAutoFit/>
+          </a:bodyPr>
+          <a:lstStyle/>
+          <a:p>
+            <a:pPr algn="l">
+              <a:lnSpc>
+                <a:spcPct val="100000"/>
+              </a:lnSpc>
+            </a:pPr>
+            <a:r>
+              <a:rPr sz="1100" b="0">
                 <a:solidFill>
                   <a:srgbClr val="182230"/>
                 </a:solidFill>
                 <a:latin typeface="Microsoft YaHei"/>
               </a:rPr>
-              <a:t>模型受约束规划</a:t>
+              <a:t>浏览器任务形态（实测重放）</a:t>
             </a:r>
           </a:p>
         </p:txBody>
@@ -14224,7 +14419,7 @@
         </p:nvSpPr>
         <p:spPr>
           <a:xfrm>
-            <a:off x="777240" y="4315968"/>
+            <a:off x="777240" y="3703320"/>
             <a:ext cx="164592" cy="201168"/>
           </a:xfrm>
           <a:prstGeom prst="rect">
@@ -14244,7 +14439,7 @@
               </a:lnSpc>
             </a:pPr>
             <a:r>
-              <a:rPr sz="800" b="1">
+              <a:rPr sz="600" b="1">
                 <a:solidFill>
                   <a:srgbClr val="165DFF"/>
                 </a:solidFill>
@@ -14263,40 +14458,196 @@
         </p:nvSpPr>
         <p:spPr>
           <a:xfrm>
-            <a:off x="1005840" y="4302252"/>
-            <a:ext cx="2651760" cy="411480"/>
-          </a:xfrm>
-          <a:prstGeom prst="rect">
-            <a:avLst/>
-          </a:prstGeom>
-          <a:noFill/>
-        </p:spPr>
-        <p:txBody>
-          <a:bodyPr wrap="square" lIns="0" rIns="0" tIns="0" bIns="0" anchor="t">
-            <a:spAutoFit/>
-          </a:bodyPr>
-          <a:lstStyle/>
-          <a:p>
-            <a:pPr algn="l">
-              <a:lnSpc>
-                <a:spcPct val="100000"/>
-              </a:lnSpc>
-            </a:pPr>
-            <a:r>
-              <a:rPr sz="1300" b="0">
+            <a:off x="1005840" y="3689604"/>
+            <a:ext cx="2743200" cy="411480"/>
+          </a:xfrm>
+          <a:prstGeom prst="rect">
+            <a:avLst/>
+          </a:prstGeom>
+          <a:noFill/>
+        </p:spPr>
+        <p:txBody>
+          <a:bodyPr wrap="square" lIns="0" rIns="0" tIns="0" bIns="0" anchor="t">
+            <a:spAutoFit/>
+          </a:bodyPr>
+          <a:lstStyle/>
+          <a:p>
+            <a:pPr algn="l">
+              <a:lnSpc>
+                <a:spcPct val="100000"/>
+              </a:lnSpc>
+            </a:pPr>
+            <a:r>
+              <a:rPr sz="1100" b="0">
                 <a:solidFill>
                   <a:srgbClr val="182230"/>
                 </a:solidFill>
                 <a:latin typeface="Microsoft YaHei"/>
               </a:rPr>
-              <a:t>Release Gate</a:t>
-            </a:r>
-          </a:p>
-        </p:txBody>
-      </p:sp>
-      <p:sp>
-        <p:nvSpPr>
-          <p:cNvPr id="18" name="Rounded Rectangle 17"/>
+              <a:t>第三方 MCP 回顾（实测重放）</a:t>
+            </a:r>
+          </a:p>
+        </p:txBody>
+      </p:sp>
+      <p:sp>
+        <p:nvSpPr>
+          <p:cNvPr id="18" name="TextBox 17"/>
+          <p:cNvSpPr txBox="1"/>
+          <p:nvPr/>
+        </p:nvSpPr>
+        <p:spPr>
+          <a:xfrm>
+            <a:off x="777240" y="4160520"/>
+            <a:ext cx="164592" cy="201168"/>
+          </a:xfrm>
+          <a:prstGeom prst="rect">
+            <a:avLst/>
+          </a:prstGeom>
+          <a:noFill/>
+        </p:spPr>
+        <p:txBody>
+          <a:bodyPr wrap="square" lIns="0" rIns="0" tIns="0" bIns="0" anchor="t">
+            <a:spAutoFit/>
+          </a:bodyPr>
+          <a:lstStyle/>
+          <a:p>
+            <a:pPr algn="l">
+              <a:lnSpc>
+                <a:spcPct val="100000"/>
+              </a:lnSpc>
+            </a:pPr>
+            <a:r>
+              <a:rPr sz="600" b="1">
+                <a:solidFill>
+                  <a:srgbClr val="165DFF"/>
+                </a:solidFill>
+                <a:latin typeface="Microsoft YaHei"/>
+              </a:rPr>
+              <a:t>●</a:t>
+            </a:r>
+          </a:p>
+        </p:txBody>
+      </p:sp>
+      <p:sp>
+        <p:nvSpPr>
+          <p:cNvPr id="19" name="TextBox 18"/>
+          <p:cNvSpPr txBox="1"/>
+          <p:nvPr/>
+        </p:nvSpPr>
+        <p:spPr>
+          <a:xfrm>
+            <a:off x="1005840" y="4146804"/>
+            <a:ext cx="2743200" cy="411480"/>
+          </a:xfrm>
+          <a:prstGeom prst="rect">
+            <a:avLst/>
+          </a:prstGeom>
+          <a:noFill/>
+        </p:spPr>
+        <p:txBody>
+          <a:bodyPr wrap="square" lIns="0" rIns="0" tIns="0" bIns="0" anchor="t">
+            <a:spAutoFit/>
+          </a:bodyPr>
+          <a:lstStyle/>
+          <a:p>
+            <a:pPr algn="l">
+              <a:lnSpc>
+                <a:spcPct val="100000"/>
+              </a:lnSpc>
+            </a:pPr>
+            <a:r>
+              <a:rPr sz="1100" b="0">
+                <a:solidFill>
+                  <a:srgbClr val="182230"/>
+                </a:solidFill>
+                <a:latin typeface="Microsoft YaHei"/>
+              </a:rPr>
+              <a:t>外部 SUT 接入模板 + E2E</a:t>
+            </a:r>
+          </a:p>
+        </p:txBody>
+      </p:sp>
+      <p:sp>
+        <p:nvSpPr>
+          <p:cNvPr id="20" name="TextBox 19"/>
+          <p:cNvSpPr txBox="1"/>
+          <p:nvPr/>
+        </p:nvSpPr>
+        <p:spPr>
+          <a:xfrm>
+            <a:off x="777240" y="4617720"/>
+            <a:ext cx="164592" cy="201168"/>
+          </a:xfrm>
+          <a:prstGeom prst="rect">
+            <a:avLst/>
+          </a:prstGeom>
+          <a:noFill/>
+        </p:spPr>
+        <p:txBody>
+          <a:bodyPr wrap="square" lIns="0" rIns="0" tIns="0" bIns="0" anchor="t">
+            <a:spAutoFit/>
+          </a:bodyPr>
+          <a:lstStyle/>
+          <a:p>
+            <a:pPr algn="l">
+              <a:lnSpc>
+                <a:spcPct val="100000"/>
+              </a:lnSpc>
+            </a:pPr>
+            <a:r>
+              <a:rPr sz="600" b="1">
+                <a:solidFill>
+                  <a:srgbClr val="165DFF"/>
+                </a:solidFill>
+                <a:latin typeface="Microsoft YaHei"/>
+              </a:rPr>
+              <a:t>●</a:t>
+            </a:r>
+          </a:p>
+        </p:txBody>
+      </p:sp>
+      <p:sp>
+        <p:nvSpPr>
+          <p:cNvPr id="21" name="TextBox 20"/>
+          <p:cNvSpPr txBox="1"/>
+          <p:nvPr/>
+        </p:nvSpPr>
+        <p:spPr>
+          <a:xfrm>
+            <a:off x="1005840" y="4604004"/>
+            <a:ext cx="2743200" cy="411480"/>
+          </a:xfrm>
+          <a:prstGeom prst="rect">
+            <a:avLst/>
+          </a:prstGeom>
+          <a:noFill/>
+        </p:spPr>
+        <p:txBody>
+          <a:bodyPr wrap="square" lIns="0" rIns="0" tIns="0" bIns="0" anchor="t">
+            <a:spAutoFit/>
+          </a:bodyPr>
+          <a:lstStyle/>
+          <a:p>
+            <a:pPr algn="l">
+              <a:lnSpc>
+                <a:spcPct val="100000"/>
+              </a:lnSpc>
+            </a:pPr>
+            <a:r>
+              <a:rPr sz="1100" b="0">
+                <a:solidFill>
+                  <a:srgbClr val="182230"/>
+                </a:solidFill>
+                <a:latin typeface="Microsoft YaHei"/>
+              </a:rPr>
+              <a:t>可校验发行包</a:t>
+            </a:r>
+          </a:p>
+        </p:txBody>
+      </p:sp>
+      <p:sp>
+        <p:nvSpPr>
+          <p:cNvPr id="22" name="Rounded Rectangle 21"/>
           <p:cNvSpPr/>
           <p:nvPr/>
         </p:nvSpPr>
@@ -14341,7 +14692,7 @@
       </p:sp>
       <p:sp>
         <p:nvSpPr>
-          <p:cNvPr id="19" name="TextBox 18"/>
+          <p:cNvPr id="23" name="TextBox 22"/>
           <p:cNvSpPr txBox="1"/>
           <p:nvPr/>
         </p:nvSpPr>
@@ -14380,7 +14731,7 @@
       </p:sp>
       <p:sp>
         <p:nvSpPr>
-          <p:cNvPr id="20" name="TextBox 19"/>
+          <p:cNvPr id="24" name="TextBox 23"/>
           <p:cNvSpPr txBox="1"/>
           <p:nvPr/>
         </p:nvSpPr>
@@ -14419,7 +14770,7 @@
       </p:sp>
       <p:sp>
         <p:nvSpPr>
-          <p:cNvPr id="21" name="TextBox 20"/>
+          <p:cNvPr id="25" name="TextBox 24"/>
           <p:cNvSpPr txBox="1"/>
           <p:nvPr/>
         </p:nvSpPr>
@@ -14451,14 +14802,14 @@
                 </a:solidFill>
                 <a:latin typeface="Microsoft YaHei"/>
               </a:rPr>
-              <a:t>公开未知故障回顾</a:t>
-            </a:r>
-          </a:p>
-        </p:txBody>
-      </p:sp>
-      <p:sp>
-        <p:nvSpPr>
-          <p:cNvPr id="22" name="TextBox 21"/>
+              <a:t>第二模型供应商对照</a:t>
+            </a:r>
+          </a:p>
+        </p:txBody>
+      </p:sp>
+      <p:sp>
+        <p:nvSpPr>
+          <p:cNvPr id="26" name="TextBox 25"/>
           <p:cNvSpPr txBox="1"/>
           <p:nvPr/>
         </p:nvSpPr>
@@ -14497,7 +14848,7 @@
       </p:sp>
       <p:sp>
         <p:nvSpPr>
-          <p:cNvPr id="23" name="TextBox 22"/>
+          <p:cNvPr id="27" name="TextBox 26"/>
           <p:cNvSpPr txBox="1"/>
           <p:nvPr/>
         </p:nvSpPr>
@@ -14529,14 +14880,14 @@
                 </a:solidFill>
                 <a:latin typeface="Microsoft YaHei"/>
               </a:rPr>
-              <a:t>第二模型供应商</a:t>
-            </a:r>
-          </a:p>
-        </p:txBody>
-      </p:sp>
-      <p:sp>
-        <p:nvSpPr>
-          <p:cNvPr id="24" name="TextBox 23"/>
+              <a:t>真实外部采用信号</a:t>
+            </a:r>
+          </a:p>
+        </p:txBody>
+      </p:sp>
+      <p:sp>
+        <p:nvSpPr>
+          <p:cNvPr id="28" name="TextBox 27"/>
           <p:cNvSpPr txBox="1"/>
           <p:nvPr/>
         </p:nvSpPr>
@@ -14575,7 +14926,7 @@
       </p:sp>
       <p:sp>
         <p:nvSpPr>
-          <p:cNvPr id="25" name="TextBox 24"/>
+          <p:cNvPr id="29" name="TextBox 28"/>
           <p:cNvSpPr txBox="1"/>
           <p:nvPr/>
         </p:nvSpPr>
@@ -14607,14 +14958,14 @@
                 </a:solidFill>
                 <a:latin typeface="Microsoft YaHei"/>
               </a:rPr>
-              <a:t>真实使用信号</a:t>
-            </a:r>
-          </a:p>
-        </p:txBody>
-      </p:sp>
-      <p:sp>
-        <p:nvSpPr>
-          <p:cNvPr id="26" name="TextBox 25"/>
+              <a:t>更多生产环境适配器</a:t>
+            </a:r>
+          </a:p>
+        </p:txBody>
+      </p:sp>
+      <p:sp>
+        <p:nvSpPr>
+          <p:cNvPr id="30" name="TextBox 29"/>
           <p:cNvSpPr txBox="1"/>
           <p:nvPr/>
         </p:nvSpPr>
@@ -14653,7 +15004,7 @@
       </p:sp>
       <p:sp>
         <p:nvSpPr>
-          <p:cNvPr id="27" name="TextBox 26"/>
+          <p:cNvPr id="31" name="TextBox 30"/>
           <p:cNvSpPr txBox="1"/>
           <p:nvPr/>
         </p:nvSpPr>
@@ -14685,14 +15036,14 @@
                 </a:solidFill>
                 <a:latin typeface="Microsoft YaHei"/>
               </a:rPr>
-              <a:t>更多发布适配器</a:t>
-            </a:r>
-          </a:p>
-        </p:txBody>
-      </p:sp>
-      <p:sp>
-        <p:nvSpPr>
-          <p:cNvPr id="28" name="Rounded Rectangle 27"/>
+              <a:t>付费试点验证（假设）</a:t>
+            </a:r>
+          </a:p>
+        </p:txBody>
+      </p:sp>
+      <p:sp>
+        <p:nvSpPr>
+          <p:cNvPr id="32" name="Rounded Rectangle 31"/>
           <p:cNvSpPr/>
           <p:nvPr/>
         </p:nvSpPr>
@@ -14737,7 +15088,7 @@
       </p:sp>
       <p:pic>
         <p:nvPicPr>
-          <p:cNvPr id="29" name="Picture 28" descr="product-site.png"/>
+          <p:cNvPr id="33" name="Picture 32" descr="product-site.png"/>
           <p:cNvPicPr>
             <a:picLocks noChangeAspect="1"/>
           </p:cNvPicPr>
@@ -14761,7 +15112,7 @@
       </p:pic>
       <p:sp>
         <p:nvSpPr>
-          <p:cNvPr id="30" name="TextBox 29"/>
+          <p:cNvPr id="34" name="TextBox 33"/>
           <p:cNvSpPr txBox="1"/>
           <p:nvPr/>
         </p:nvSpPr>
@@ -14801,7 +15152,7 @@
       </p:sp>
       <p:sp>
         <p:nvSpPr>
-          <p:cNvPr id="31" name="Rounded Rectangle 30"/>
+          <p:cNvPr id="35" name="Rounded Rectangle 34"/>
           <p:cNvSpPr/>
           <p:nvPr/>
         </p:nvSpPr>
@@ -14846,7 +15197,7 @@
       </p:sp>
       <p:sp>
         <p:nvSpPr>
-          <p:cNvPr id="32" name="TextBox 31"/>
+          <p:cNvPr id="36" name="TextBox 35"/>
           <p:cNvSpPr txBox="1"/>
           <p:nvPr/>
         </p:nvSpPr>
